--- a/examples/plano-estrategico.pptx
+++ b/examples/plano-estrategico.pptx
@@ -3438,8 +3438,8 @@
         </p:nvSpPr>
         <p:spPr>
           <a:xfrm>
-            <a:off x="731520" y="2194560"/>
-            <a:ext cx="10698480" cy="1463040"/>
+            <a:off x="731520" y="1920240"/>
+            <a:ext cx="10698480" cy="1737360"/>
           </a:xfrm>
           <a:prstGeom prst="rect">
             <a:avLst/>
@@ -3496,6 +3496,41 @@
                 <a:latin typeface="Arial"/>
               </a:rPr>
               <a:t>Proposta para aprovação do conselho</a:t>
+            </a:r>
+          </a:p>
+        </p:txBody>
+      </p:sp>
+      <p:sp>
+        <p:nvSpPr>
+          <p:cNvPr id="5" name="TextBox 4"/>
+          <p:cNvSpPr txBox="1"/>
+          <p:nvPr/>
+        </p:nvSpPr>
+        <p:spPr>
+          <a:xfrm>
+            <a:off x="731520" y="5669280"/>
+            <a:ext cx="10698480" cy="457200"/>
+          </a:xfrm>
+          <a:prstGeom prst="rect">
+            <a:avLst/>
+          </a:prstGeom>
+          <a:noFill/>
+        </p:spPr>
+        <p:txBody>
+          <a:bodyPr wrap="square" anchor="t" lIns="45720" rIns="45720" tIns="27432" bIns="27432">
+            <a:spAutoFit/>
+          </a:bodyPr>
+          <a:lstStyle/>
+          <a:p>
+            <a:pPr algn="l"/>
+            <a:r>
+              <a:rPr sz="1300" b="0" i="0">
+                <a:solidFill>
+                  <a:srgbClr val="BFC9D4"/>
+                </a:solidFill>
+                <a:latin typeface="Arial"/>
+              </a:rPr>
+              <a:t>2026-11-10</a:t>
             </a:r>
           </a:p>
         </p:txBody>
@@ -3664,8 +3699,8 @@
         </p:nvSpPr>
         <p:spPr>
           <a:xfrm>
-            <a:off x="10817352" y="6217920"/>
-            <a:ext cx="914400" cy="365760"/>
+            <a:off x="7772400" y="91440"/>
+            <a:ext cx="3959352" cy="228600"/>
           </a:xfrm>
           <a:prstGeom prst="rect">
             <a:avLst/>
@@ -3680,6 +3715,41 @@
           <a:p>
             <a:pPr algn="r"/>
             <a:r>
+              <a:rPr sz="900" b="0" i="0">
+                <a:solidFill>
+                  <a:srgbClr val="7F7F7F"/>
+                </a:solidFill>
+                <a:latin typeface="Arial"/>
+              </a:rPr>
+              <a:t>2026-11-10</a:t>
+            </a:r>
+          </a:p>
+        </p:txBody>
+      </p:sp>
+      <p:sp>
+        <p:nvSpPr>
+          <p:cNvPr id="4" name="TextBox 3"/>
+          <p:cNvSpPr txBox="1"/>
+          <p:nvPr/>
+        </p:nvSpPr>
+        <p:spPr>
+          <a:xfrm>
+            <a:off x="10817352" y="6217920"/>
+            <a:ext cx="914400" cy="365760"/>
+          </a:xfrm>
+          <a:prstGeom prst="rect">
+            <a:avLst/>
+          </a:prstGeom>
+          <a:noFill/>
+        </p:spPr>
+        <p:txBody>
+          <a:bodyPr wrap="square" anchor="ctr" lIns="45720" rIns="45720" tIns="27432" bIns="27432">
+            <a:spAutoFit/>
+          </a:bodyPr>
+          <a:lstStyle/>
+          <a:p>
+            <a:pPr algn="r"/>
+            <a:r>
               <a:rPr sz="1000" b="0" i="0">
                 <a:solidFill>
                   <a:srgbClr val="7F7F7F"/>
@@ -3693,7 +3763,7 @@
       </p:sp>
       <p:sp>
         <p:nvSpPr>
-          <p:cNvPr id="4" name="Rectangle 3"/>
+          <p:cNvPr id="5" name="Rectangle 4"/>
           <p:cNvSpPr/>
           <p:nvPr/>
         </p:nvSpPr>
@@ -3737,7 +3807,7 @@
       </p:sp>
       <p:sp>
         <p:nvSpPr>
-          <p:cNvPr id="5" name="Rectangle 4"/>
+          <p:cNvPr id="6" name="Rectangle 5"/>
           <p:cNvSpPr/>
           <p:nvPr/>
         </p:nvSpPr>
@@ -3781,7 +3851,7 @@
       </p:sp>
       <p:sp>
         <p:nvSpPr>
-          <p:cNvPr id="6" name="TextBox 5"/>
+          <p:cNvPr id="7" name="TextBox 6"/>
           <p:cNvSpPr txBox="1"/>
           <p:nvPr/>
         </p:nvSpPr>
@@ -3816,7 +3886,7 @@
       </p:sp>
       <p:sp>
         <p:nvSpPr>
-          <p:cNvPr id="7" name="Oval 6"/>
+          <p:cNvPr id="8" name="Oval 7"/>
           <p:cNvSpPr/>
           <p:nvPr/>
         </p:nvSpPr>
@@ -3869,7 +3939,7 @@
       </p:sp>
       <p:sp>
         <p:nvSpPr>
-          <p:cNvPr id="8" name="TextBox 7"/>
+          <p:cNvPr id="9" name="TextBox 8"/>
           <p:cNvSpPr txBox="1"/>
           <p:nvPr/>
         </p:nvSpPr>
@@ -3904,7 +3974,7 @@
       </p:sp>
       <p:sp>
         <p:nvSpPr>
-          <p:cNvPr id="9" name="Oval 8"/>
+          <p:cNvPr id="10" name="Oval 9"/>
           <p:cNvSpPr/>
           <p:nvPr/>
         </p:nvSpPr>
@@ -3957,7 +4027,7 @@
       </p:sp>
       <p:sp>
         <p:nvSpPr>
-          <p:cNvPr id="10" name="TextBox 9"/>
+          <p:cNvPr id="11" name="TextBox 10"/>
           <p:cNvSpPr txBox="1"/>
           <p:nvPr/>
         </p:nvSpPr>
@@ -3992,7 +4062,7 @@
       </p:sp>
       <p:sp>
         <p:nvSpPr>
-          <p:cNvPr id="11" name="Oval 10"/>
+          <p:cNvPr id="12" name="Oval 11"/>
           <p:cNvSpPr/>
           <p:nvPr/>
         </p:nvSpPr>
@@ -4045,7 +4115,7 @@
       </p:sp>
       <p:sp>
         <p:nvSpPr>
-          <p:cNvPr id="12" name="TextBox 11"/>
+          <p:cNvPr id="13" name="TextBox 12"/>
           <p:cNvSpPr txBox="1"/>
           <p:nvPr/>
         </p:nvSpPr>
@@ -4080,7 +4150,7 @@
       </p:sp>
       <p:sp>
         <p:nvSpPr>
-          <p:cNvPr id="13" name="Rectangle 12"/>
+          <p:cNvPr id="14" name="Rectangle 13"/>
           <p:cNvSpPr/>
           <p:nvPr/>
         </p:nvSpPr>
@@ -4126,7 +4196,7 @@
       </p:sp>
       <p:sp>
         <p:nvSpPr>
-          <p:cNvPr id="14" name="TextBox 13"/>
+          <p:cNvPr id="15" name="TextBox 14"/>
           <p:cNvSpPr txBox="1"/>
           <p:nvPr/>
         </p:nvSpPr>
@@ -4332,8 +4402,8 @@
         </p:nvSpPr>
         <p:spPr>
           <a:xfrm>
-            <a:off x="457200" y="6217920"/>
-            <a:ext cx="10360152" cy="365760"/>
+            <a:off x="7772400" y="91440"/>
+            <a:ext cx="3959352" cy="228600"/>
           </a:xfrm>
           <a:prstGeom prst="rect">
             <a:avLst/>
@@ -4346,15 +4416,15 @@
           </a:bodyPr>
           <a:lstStyle/>
           <a:p>
-            <a:pPr algn="l"/>
-            <a:r>
-              <a:rPr sz="1000" b="0" i="0">
+            <a:pPr algn="r"/>
+            <a:r>
+              <a:rPr sz="900" b="0" i="0">
                 <a:solidFill>
                   <a:srgbClr val="7F7F7F"/>
                 </a:solidFill>
                 <a:latin typeface="Arial"/>
               </a:rPr>
-              <a:t>Fonte: Relatórios setoriais, dados internos</a:t>
+              <a:t>2026-11-10</a:t>
             </a:r>
           </a:p>
         </p:txBody>
@@ -4367,8 +4437,8 @@
         </p:nvSpPr>
         <p:spPr>
           <a:xfrm>
-            <a:off x="10817352" y="6217920"/>
-            <a:ext cx="914400" cy="365760"/>
+            <a:off x="457200" y="6217920"/>
+            <a:ext cx="8531352" cy="365760"/>
           </a:xfrm>
           <a:prstGeom prst="rect">
             <a:avLst/>
@@ -4381,6 +4451,41 @@
           </a:bodyPr>
           <a:lstStyle/>
           <a:p>
+            <a:pPr algn="l"/>
+            <a:r>
+              <a:rPr sz="1000" b="0" i="0">
+                <a:solidFill>
+                  <a:srgbClr val="7F7F7F"/>
+                </a:solidFill>
+                <a:latin typeface="Arial"/>
+              </a:rPr>
+              <a:t>Fonte: Relatórios setoriais, dados internos</a:t>
+            </a:r>
+          </a:p>
+        </p:txBody>
+      </p:sp>
+      <p:sp>
+        <p:nvSpPr>
+          <p:cNvPr id="5" name="TextBox 4"/>
+          <p:cNvSpPr txBox="1"/>
+          <p:nvPr/>
+        </p:nvSpPr>
+        <p:spPr>
+          <a:xfrm>
+            <a:off x="10817352" y="6217920"/>
+            <a:ext cx="914400" cy="365760"/>
+          </a:xfrm>
+          <a:prstGeom prst="rect">
+            <a:avLst/>
+          </a:prstGeom>
+          <a:noFill/>
+        </p:spPr>
+        <p:txBody>
+          <a:bodyPr wrap="square" anchor="ctr" lIns="45720" rIns="45720" tIns="27432" bIns="27432">
+            <a:spAutoFit/>
+          </a:bodyPr>
+          <a:lstStyle/>
+          <a:p>
             <a:pPr algn="r"/>
             <a:r>
               <a:rPr sz="1000" b="0" i="0">
@@ -4396,7 +4501,7 @@
       </p:sp>
       <p:graphicFrame>
         <p:nvGraphicFramePr>
-          <p:cNvPr id="5" name="Chart 4"/>
+          <p:cNvPr id="6" name="Chart 5"/>
           <p:cNvGraphicFramePr>
             <a:graphicFrameLocks noGrp="1"/>
           </p:cNvGraphicFramePr>
@@ -4567,8 +4672,8 @@
         </p:nvSpPr>
         <p:spPr>
           <a:xfrm>
-            <a:off x="10817352" y="6217920"/>
-            <a:ext cx="914400" cy="365760"/>
+            <a:off x="7772400" y="91440"/>
+            <a:ext cx="3959352" cy="228600"/>
           </a:xfrm>
           <a:prstGeom prst="rect">
             <a:avLst/>
@@ -4583,6 +4688,41 @@
           <a:p>
             <a:pPr algn="r"/>
             <a:r>
+              <a:rPr sz="900" b="0" i="0">
+                <a:solidFill>
+                  <a:srgbClr val="7F7F7F"/>
+                </a:solidFill>
+                <a:latin typeface="Arial"/>
+              </a:rPr>
+              <a:t>2026-11-10</a:t>
+            </a:r>
+          </a:p>
+        </p:txBody>
+      </p:sp>
+      <p:sp>
+        <p:nvSpPr>
+          <p:cNvPr id="4" name="TextBox 3"/>
+          <p:cNvSpPr txBox="1"/>
+          <p:nvPr/>
+        </p:nvSpPr>
+        <p:spPr>
+          <a:xfrm>
+            <a:off x="10817352" y="6217920"/>
+            <a:ext cx="914400" cy="365760"/>
+          </a:xfrm>
+          <a:prstGeom prst="rect">
+            <a:avLst/>
+          </a:prstGeom>
+          <a:noFill/>
+        </p:spPr>
+        <p:txBody>
+          <a:bodyPr wrap="square" anchor="ctr" lIns="45720" rIns="45720" tIns="27432" bIns="27432">
+            <a:spAutoFit/>
+          </a:bodyPr>
+          <a:lstStyle/>
+          <a:p>
+            <a:pPr algn="r"/>
+            <a:r>
               <a:rPr sz="1000" b="0" i="0">
                 <a:solidFill>
                   <a:srgbClr val="7F7F7F"/>
@@ -4596,7 +4736,7 @@
       </p:sp>
       <p:sp>
         <p:nvSpPr>
-          <p:cNvPr id="4" name="Rectangle 3"/>
+          <p:cNvPr id="5" name="Rectangle 4"/>
           <p:cNvSpPr/>
           <p:nvPr/>
         </p:nvSpPr>
@@ -4640,7 +4780,7 @@
       </p:sp>
       <p:sp>
         <p:nvSpPr>
-          <p:cNvPr id="5" name="Rectangle 4"/>
+          <p:cNvPr id="6" name="Rectangle 5"/>
           <p:cNvSpPr/>
           <p:nvPr/>
         </p:nvSpPr>
@@ -4684,7 +4824,7 @@
       </p:sp>
       <p:sp>
         <p:nvSpPr>
-          <p:cNvPr id="6" name="TextBox 5"/>
+          <p:cNvPr id="7" name="TextBox 6"/>
           <p:cNvSpPr txBox="1"/>
           <p:nvPr/>
         </p:nvSpPr>
@@ -4719,7 +4859,7 @@
       </p:sp>
       <p:sp>
         <p:nvSpPr>
-          <p:cNvPr id="7" name="TextBox 6"/>
+          <p:cNvPr id="8" name="TextBox 7"/>
           <p:cNvSpPr txBox="1"/>
           <p:nvPr/>
         </p:nvSpPr>
@@ -4802,7 +4942,7 @@
       </p:sp>
       <p:sp>
         <p:nvSpPr>
-          <p:cNvPr id="8" name="Rectangle 7"/>
+          <p:cNvPr id="9" name="Rectangle 8"/>
           <p:cNvSpPr/>
           <p:nvPr/>
         </p:nvSpPr>
@@ -4846,7 +4986,7 @@
       </p:sp>
       <p:sp>
         <p:nvSpPr>
-          <p:cNvPr id="9" name="Rectangle 8"/>
+          <p:cNvPr id="10" name="Rectangle 9"/>
           <p:cNvSpPr/>
           <p:nvPr/>
         </p:nvSpPr>
@@ -4890,7 +5030,7 @@
       </p:sp>
       <p:sp>
         <p:nvSpPr>
-          <p:cNvPr id="10" name="TextBox 9"/>
+          <p:cNvPr id="11" name="TextBox 10"/>
           <p:cNvSpPr txBox="1"/>
           <p:nvPr/>
         </p:nvSpPr>
@@ -4925,7 +5065,7 @@
       </p:sp>
       <p:sp>
         <p:nvSpPr>
-          <p:cNvPr id="11" name="TextBox 10"/>
+          <p:cNvPr id="12" name="TextBox 11"/>
           <p:cNvSpPr txBox="1"/>
           <p:nvPr/>
         </p:nvSpPr>
@@ -5008,7 +5148,7 @@
       </p:sp>
       <p:sp>
         <p:nvSpPr>
-          <p:cNvPr id="12" name="Rectangle 11"/>
+          <p:cNvPr id="13" name="Rectangle 12"/>
           <p:cNvSpPr/>
           <p:nvPr/>
         </p:nvSpPr>
@@ -5052,7 +5192,7 @@
       </p:sp>
       <p:sp>
         <p:nvSpPr>
-          <p:cNvPr id="13" name="Rectangle 12"/>
+          <p:cNvPr id="14" name="Rectangle 13"/>
           <p:cNvSpPr/>
           <p:nvPr/>
         </p:nvSpPr>
@@ -5096,7 +5236,7 @@
       </p:sp>
       <p:sp>
         <p:nvSpPr>
-          <p:cNvPr id="14" name="TextBox 13"/>
+          <p:cNvPr id="15" name="TextBox 14"/>
           <p:cNvSpPr txBox="1"/>
           <p:nvPr/>
         </p:nvSpPr>
@@ -5131,7 +5271,7 @@
       </p:sp>
       <p:sp>
         <p:nvSpPr>
-          <p:cNvPr id="15" name="TextBox 14"/>
+          <p:cNvPr id="16" name="TextBox 15"/>
           <p:cNvSpPr txBox="1"/>
           <p:nvPr/>
         </p:nvSpPr>
@@ -5271,8 +5411,8 @@
         </p:nvSpPr>
         <p:spPr>
           <a:xfrm>
-            <a:off x="10817352" y="6217920"/>
-            <a:ext cx="914400" cy="365760"/>
+            <a:off x="7772400" y="91440"/>
+            <a:ext cx="3959352" cy="228600"/>
           </a:xfrm>
           <a:prstGeom prst="rect">
             <a:avLst/>
@@ -5287,6 +5427,41 @@
           <a:p>
             <a:pPr algn="r"/>
             <a:r>
+              <a:rPr sz="900" b="0" i="0">
+                <a:solidFill>
+                  <a:srgbClr val="7F7F7F"/>
+                </a:solidFill>
+                <a:latin typeface="Arial"/>
+              </a:rPr>
+              <a:t>2026-11-10</a:t>
+            </a:r>
+          </a:p>
+        </p:txBody>
+      </p:sp>
+      <p:sp>
+        <p:nvSpPr>
+          <p:cNvPr id="4" name="TextBox 3"/>
+          <p:cNvSpPr txBox="1"/>
+          <p:nvPr/>
+        </p:nvSpPr>
+        <p:spPr>
+          <a:xfrm>
+            <a:off x="10817352" y="6217920"/>
+            <a:ext cx="914400" cy="365760"/>
+          </a:xfrm>
+          <a:prstGeom prst="rect">
+            <a:avLst/>
+          </a:prstGeom>
+          <a:noFill/>
+        </p:spPr>
+        <p:txBody>
+          <a:bodyPr wrap="square" anchor="ctr" lIns="45720" rIns="45720" tIns="27432" bIns="27432">
+            <a:spAutoFit/>
+          </a:bodyPr>
+          <a:lstStyle/>
+          <a:p>
+            <a:pPr algn="r"/>
+            <a:r>
               <a:rPr sz="1000" b="0" i="0">
                 <a:solidFill>
                   <a:srgbClr val="7F7F7F"/>
@@ -5300,7 +5475,7 @@
       </p:sp>
       <p:sp>
         <p:nvSpPr>
-          <p:cNvPr id="4" name="Rectangle 3"/>
+          <p:cNvPr id="5" name="Rectangle 4"/>
           <p:cNvSpPr/>
           <p:nvPr/>
         </p:nvSpPr>
@@ -5344,7 +5519,7 @@
       </p:sp>
       <p:sp>
         <p:nvSpPr>
-          <p:cNvPr id="5" name="Oval 4"/>
+          <p:cNvPr id="6" name="Oval 5"/>
           <p:cNvSpPr/>
           <p:nvPr/>
         </p:nvSpPr>
@@ -5390,7 +5565,7 @@
       </p:sp>
       <p:sp>
         <p:nvSpPr>
-          <p:cNvPr id="6" name="TextBox 5"/>
+          <p:cNvPr id="7" name="TextBox 6"/>
           <p:cNvSpPr txBox="1"/>
           <p:nvPr/>
         </p:nvSpPr>
@@ -5425,7 +5600,7 @@
       </p:sp>
       <p:sp>
         <p:nvSpPr>
-          <p:cNvPr id="7" name="TextBox 6"/>
+          <p:cNvPr id="8" name="TextBox 7"/>
           <p:cNvSpPr txBox="1"/>
           <p:nvPr/>
         </p:nvSpPr>
@@ -5460,7 +5635,7 @@
       </p:sp>
       <p:sp>
         <p:nvSpPr>
-          <p:cNvPr id="8" name="Oval 7"/>
+          <p:cNvPr id="9" name="Oval 8"/>
           <p:cNvSpPr/>
           <p:nvPr/>
         </p:nvSpPr>
@@ -5506,7 +5681,7 @@
       </p:sp>
       <p:sp>
         <p:nvSpPr>
-          <p:cNvPr id="9" name="TextBox 8"/>
+          <p:cNvPr id="10" name="TextBox 9"/>
           <p:cNvSpPr txBox="1"/>
           <p:nvPr/>
         </p:nvSpPr>
@@ -5541,7 +5716,7 @@
       </p:sp>
       <p:sp>
         <p:nvSpPr>
-          <p:cNvPr id="10" name="TextBox 9"/>
+          <p:cNvPr id="11" name="TextBox 10"/>
           <p:cNvSpPr txBox="1"/>
           <p:nvPr/>
         </p:nvSpPr>
@@ -5576,7 +5751,7 @@
       </p:sp>
       <p:sp>
         <p:nvSpPr>
-          <p:cNvPr id="11" name="Oval 10"/>
+          <p:cNvPr id="12" name="Oval 11"/>
           <p:cNvSpPr/>
           <p:nvPr/>
         </p:nvSpPr>
@@ -5622,7 +5797,7 @@
       </p:sp>
       <p:sp>
         <p:nvSpPr>
-          <p:cNvPr id="12" name="TextBox 11"/>
+          <p:cNvPr id="13" name="TextBox 12"/>
           <p:cNvSpPr txBox="1"/>
           <p:nvPr/>
         </p:nvSpPr>
@@ -5657,7 +5832,7 @@
       </p:sp>
       <p:sp>
         <p:nvSpPr>
-          <p:cNvPr id="13" name="TextBox 12"/>
+          <p:cNvPr id="14" name="TextBox 13"/>
           <p:cNvSpPr txBox="1"/>
           <p:nvPr/>
         </p:nvSpPr>
@@ -5692,7 +5867,7 @@
       </p:sp>
       <p:sp>
         <p:nvSpPr>
-          <p:cNvPr id="14" name="Oval 13"/>
+          <p:cNvPr id="15" name="Oval 14"/>
           <p:cNvSpPr/>
           <p:nvPr/>
         </p:nvSpPr>
@@ -5736,7 +5911,7 @@
       </p:sp>
       <p:sp>
         <p:nvSpPr>
-          <p:cNvPr id="15" name="TextBox 14"/>
+          <p:cNvPr id="16" name="TextBox 15"/>
           <p:cNvSpPr txBox="1"/>
           <p:nvPr/>
         </p:nvSpPr>
@@ -5828,8 +6003,8 @@
         </p:nvSpPr>
         <p:spPr>
           <a:xfrm>
-            <a:off x="10817352" y="6217920"/>
-            <a:ext cx="914400" cy="365760"/>
+            <a:off x="7772400" y="91440"/>
+            <a:ext cx="3959352" cy="228600"/>
           </a:xfrm>
           <a:prstGeom prst="rect">
             <a:avLst/>
@@ -5844,6 +6019,41 @@
           <a:p>
             <a:pPr algn="r"/>
             <a:r>
+              <a:rPr sz="900" b="0" i="0">
+                <a:solidFill>
+                  <a:srgbClr val="7F7F7F"/>
+                </a:solidFill>
+                <a:latin typeface="Arial"/>
+              </a:rPr>
+              <a:t>2026-11-10</a:t>
+            </a:r>
+          </a:p>
+        </p:txBody>
+      </p:sp>
+      <p:sp>
+        <p:nvSpPr>
+          <p:cNvPr id="4" name="TextBox 3"/>
+          <p:cNvSpPr txBox="1"/>
+          <p:nvPr/>
+        </p:nvSpPr>
+        <p:spPr>
+          <a:xfrm>
+            <a:off x="10817352" y="6217920"/>
+            <a:ext cx="914400" cy="365760"/>
+          </a:xfrm>
+          <a:prstGeom prst="rect">
+            <a:avLst/>
+          </a:prstGeom>
+          <a:noFill/>
+        </p:spPr>
+        <p:txBody>
+          <a:bodyPr wrap="square" anchor="ctr" lIns="45720" rIns="45720" tIns="27432" bIns="27432">
+            <a:spAutoFit/>
+          </a:bodyPr>
+          <a:lstStyle/>
+          <a:p>
+            <a:pPr algn="r"/>
+            <a:r>
               <a:rPr sz="1000" b="0" i="0">
                 <a:solidFill>
                   <a:srgbClr val="7F7F7F"/>
@@ -5857,7 +6067,7 @@
       </p:sp>
       <p:graphicFrame>
         <p:nvGraphicFramePr>
-          <p:cNvPr id="4" name="Table 3"/>
+          <p:cNvPr id="5" name="Table 4"/>
           <p:cNvGraphicFramePr>
             <a:graphicFrameLocks noGrp="1"/>
           </p:cNvGraphicFramePr>
@@ -6318,8 +6528,8 @@
         </p:nvSpPr>
         <p:spPr>
           <a:xfrm>
-            <a:off x="10817352" y="6217920"/>
-            <a:ext cx="914400" cy="365760"/>
+            <a:off x="7772400" y="91440"/>
+            <a:ext cx="3959352" cy="228600"/>
           </a:xfrm>
           <a:prstGeom prst="rect">
             <a:avLst/>
@@ -6334,6 +6544,41 @@
           <a:p>
             <a:pPr algn="r"/>
             <a:r>
+              <a:rPr sz="900" b="0" i="0">
+                <a:solidFill>
+                  <a:srgbClr val="7F7F7F"/>
+                </a:solidFill>
+                <a:latin typeface="Arial"/>
+              </a:rPr>
+              <a:t>2026-11-10</a:t>
+            </a:r>
+          </a:p>
+        </p:txBody>
+      </p:sp>
+      <p:sp>
+        <p:nvSpPr>
+          <p:cNvPr id="4" name="TextBox 3"/>
+          <p:cNvSpPr txBox="1"/>
+          <p:nvPr/>
+        </p:nvSpPr>
+        <p:spPr>
+          <a:xfrm>
+            <a:off x="10817352" y="6217920"/>
+            <a:ext cx="914400" cy="365760"/>
+          </a:xfrm>
+          <a:prstGeom prst="rect">
+            <a:avLst/>
+          </a:prstGeom>
+          <a:noFill/>
+        </p:spPr>
+        <p:txBody>
+          <a:bodyPr wrap="square" anchor="ctr" lIns="45720" rIns="45720" tIns="27432" bIns="27432">
+            <a:spAutoFit/>
+          </a:bodyPr>
+          <a:lstStyle/>
+          <a:p>
+            <a:pPr algn="r"/>
+            <a:r>
               <a:rPr sz="1000" b="0" i="0">
                 <a:solidFill>
                   <a:srgbClr val="7F7F7F"/>
@@ -6347,7 +6592,7 @@
       </p:sp>
       <p:graphicFrame>
         <p:nvGraphicFramePr>
-          <p:cNvPr id="4" name="Table 3"/>
+          <p:cNvPr id="5" name="Table 4"/>
           <p:cNvGraphicFramePr>
             <a:graphicFrameLocks noGrp="1"/>
           </p:cNvGraphicFramePr>

--- a/examples/plano-estrategico.pptx
+++ b/examples/plano-estrategico.pptx
@@ -4501,7 +4501,7 @@
       </p:sp>
       <p:graphicFrame>
         <p:nvGraphicFramePr>
-          <p:cNvPr id="6" name="Chart 5"/>
+          <p:cNvPr id="6" name="Chart 5" descr="Perdemos 2 p.p. de share em 3 anos"/>
           <p:cNvGraphicFramePr>
             <a:graphicFrameLocks noGrp="1"/>
           </p:cNvGraphicFramePr>
